--- a/curso/pptx/S39.pptx
+++ b/curso/pptx/S39.pptx
@@ -6997,7 +6997,7 @@
                 </a:solidFill>
                 <a:latin typeface="Nunito Sans"/>
               </a:rPr>
-              <a:t>Población:</a:t>
+              <a:t>总体：</a:t>
             </a:r>
             <a:r>
               <a:rPr sz="2800" b="0">
@@ -7006,7 +7006,7 @@
                 </a:solidFill>
                 <a:latin typeface="Nunito Sans"/>
               </a:rPr>
-              <a:t> todo el grupo del que se habla</a:t>
+              <a:t>所谈论的整个群体</a:t>
             </a:r>
           </a:p>
           <a:p>
@@ -7031,7 +7031,7 @@
                 </a:solidFill>
                 <a:latin typeface="Nunito Sans"/>
               </a:rPr>
-              <a:t>Muestra:</a:t>
+              <a:t>样本：</a:t>
             </a:r>
             <a:r>
               <a:rPr sz="2800" b="0">
@@ -7040,7 +7040,7 @@
                 </a:solidFill>
                 <a:latin typeface="Nunito Sans"/>
               </a:rPr>
-              <a:t> la parte a la que se pregunta</a:t>
+              <a:t>被提问的那一部分</a:t>
             </a:r>
           </a:p>
           <a:p>
@@ -7065,7 +7065,7 @@
                 </a:solidFill>
                 <a:latin typeface="Nunito Sans"/>
               </a:rPr>
-              <a:t>Como probar una cucharada para saber cómo está la sopa (bien removida)</a:t>
+              <a:t>就像尝一勺汤，就知道整锅汤怎么样（要搅拌均匀）</a:t>
             </a:r>
           </a:p>
           <a:p>
@@ -7090,7 +7090,7 @@
                 </a:solidFill>
                 <a:latin typeface="Nunito Sans"/>
               </a:rPr>
-              <a:t>Al azar:</a:t>
+              <a:t>随机：</a:t>
             </a:r>
             <a:r>
               <a:rPr sz="2800" b="0">
@@ -7099,7 +7099,7 @@
                 </a:solidFill>
                 <a:latin typeface="Nunito Sans"/>
               </a:rPr>
-              <a:t> por sorteo, sin elegir a quién</a:t>
+              <a:t>抽签决定，不挑选问谁</a:t>
             </a:r>
           </a:p>
         </p:txBody>
@@ -7251,7 +7251,7 @@
                 </a:solidFill>
                 <a:latin typeface="Nunito Sans"/>
               </a:rPr>
-              <a:t>¿A cuántos?</a:t>
+              <a:t>问了多少人？</a:t>
             </a:r>
             <a:r>
               <a:rPr sz="2800" b="0">
@@ -7260,7 +7260,7 @@
                 </a:solidFill>
                 <a:latin typeface="Nunito Sans"/>
               </a:rPr>
-              <a:t> Con 5 personas se puede decir muy poco de miles</a:t>
+              <a:t>只问5个人，对成千上万的人几乎说明不了什么</a:t>
             </a:r>
           </a:p>
           <a:p>
@@ -7285,7 +7285,7 @@
                 </a:solidFill>
                 <a:latin typeface="Nunito Sans"/>
               </a:rPr>
-              <a:t>¿A quiénes?</a:t>
+              <a:t>问了哪些人？</a:t>
             </a:r>
             <a:r>
               <a:rPr sz="2800" b="0">
@@ -7294,7 +7294,7 @@
                 </a:solidFill>
                 <a:latin typeface="Nunito Sans"/>
               </a:rPr>
-              <a:t> La muestra tiene que parecerse a la población</a:t>
+              <a:t>样本必须和总体相似</a:t>
             </a:r>
           </a:p>
           <a:p>
@@ -7319,7 +7319,7 @@
                 </a:solidFill>
                 <a:latin typeface="Nunito Sans"/>
               </a:rPr>
-              <a:t>¿Cómo se preguntó?</a:t>
+              <a:t>是怎么问的？</a:t>
             </a:r>
             <a:r>
               <a:rPr sz="2800" b="0">
@@ -7328,7 +7328,7 @@
                 </a:solidFill>
                 <a:latin typeface="Nunito Sans"/>
               </a:rPr>
-              <a:t> La pregunta también puede empujar la respuesta</a:t>
+              <a:t>问题本身也可能把回答往某个方向推</a:t>
             </a:r>
           </a:p>
           <a:p>
@@ -7353,7 +7353,7 @@
                 </a:solidFill>
                 <a:latin typeface="Nunito Sans"/>
               </a:rPr>
-              <a:t>Una muestra que no se parece está </a:t>
+              <a:t>和总体不相似的样本是</a:t>
             </a:r>
             <a:r>
               <a:rPr sz="2800" b="1">
@@ -7362,7 +7362,7 @@
                 </a:solidFill>
                 <a:latin typeface="Nunito Sans"/>
               </a:rPr>
-              <a:t>sesgada</a:t>
+              <a:t>有偏的</a:t>
             </a:r>
             <a:r>
               <a:rPr sz="2800" b="0">
@@ -7371,7 +7371,7 @@
                 </a:solidFill>
                 <a:latin typeface="Nunito Sans"/>
               </a:rPr>
-              <a:t>: torcida, inclinada hacia un lado</a:t>
+              <a:t>：被扭曲了，偏向了一边</a:t>
             </a:r>
           </a:p>
         </p:txBody>

--- a/curso/pptx/S39.pptx
+++ b/curso/pptx/S39.pptx
@@ -7674,7 +7674,7 @@
                           </a:solidFill>
                           <a:latin typeface="Nunito Sans"/>
                         </a:rPr>
-                        <a:t>Kevin的3个朋友</a:t>
+                        <a:t>一个男孩的3个朋友</a:t>
                       </a:r>
                     </a:p>
                   </a:txBody>
